--- a/assets/pptx/catalog-340.pptx
+++ b/assets/pptx/catalog-340.pptx
@@ -3302,7 +3302,7 @@
                 <a:ea typeface="Ebrima"/>
                 <a:cs typeface="Ebrima"/>
               </a:rPr>
-              <a:t>መንፈስህ ያግዘኝ ይጽና መሰረቴ (2x)</a:t>
+              <a:t>መንፈስህ ያግዘኝ ይጽና መሰረቴ 2x</a:t>
             </a:r>
           </a:p>
         </p:txBody>
@@ -3580,7 +3580,7 @@
                 <a:ea typeface="Ebrima"/>
                 <a:cs typeface="Ebrima"/>
               </a:rPr>
-              <a:t>አንተን መፍራት ሙላኝ ዝቅ ልበልልህ (2x)</a:t>
+              <a:t>አንተን መፍራት ሙላኝ ዝቅ ልበልልህ 2x</a:t>
             </a:r>
           </a:p>
         </p:txBody>
@@ -3858,7 +3858,7 @@
                 <a:ea typeface="Ebrima"/>
                 <a:cs typeface="Ebrima"/>
               </a:rPr>
-              <a:t>ኋላ ሞልቶ ይፈሣል ከአንተ በረከቱ (2x)</a:t>
+              <a:t>ኋላ ሞልቶ ይፈሣል ከአንተ በረከቱ 2x</a:t>
             </a:r>
           </a:p>
         </p:txBody>
@@ -4136,7 +4136,7 @@
                 <a:ea typeface="Ebrima"/>
                 <a:cs typeface="Ebrima"/>
               </a:rPr>
-              <a:t>እንደ ሀሳብህ ኖሬ ማለፍን እሻለሁ (2x)</a:t>
+              <a:t>እንደ ሀሳብህ ኖሬ ማለፍን እሻለሁ 2x</a:t>
             </a:r>
           </a:p>
         </p:txBody>
@@ -4293,7 +4293,7 @@
                 <a:ea typeface="Ebrima"/>
                 <a:cs typeface="Ebrima"/>
               </a:rPr>
-              <a:t>ከፍ ያድርግህ ያክብርህ አሜን (2x)</a:t>
+              <a:t>ከፍ ያድርግህ ያክብርህ አሜን 2x</a:t>
             </a:r>
           </a:p>
         </p:txBody>
